--- a/eBus_Functions/Post_Processing/Report_Templates/Single_Sim_Report_Templates/eBus_Sim_Battery.pptx
+++ b/eBus_Functions/Post_Processing/Report_Templates/Single_Sim_Report_Templates/eBus_Sim_Battery.pptx
@@ -8,13 +8,10 @@
     <p:sldId id="256" r:id="rId2"/>
     <p:sldId id="257" r:id="rId3"/>
     <p:sldId id="258" r:id="rId4"/>
-    <p:sldId id="264" r:id="rId5"/>
-    <p:sldId id="265" r:id="rId6"/>
-    <p:sldId id="259" r:id="rId7"/>
-    <p:sldId id="260" r:id="rId8"/>
-    <p:sldId id="261" r:id="rId9"/>
-    <p:sldId id="262" r:id="rId10"/>
-    <p:sldId id="263" r:id="rId11"/>
+    <p:sldId id="266" r:id="rId5"/>
+    <p:sldId id="268" r:id="rId6"/>
+    <p:sldId id="267" r:id="rId7"/>
+    <p:sldId id="261" r:id="rId8"/>
   </p:sldIdLst>
   <p:sldSz cx="12192000" cy="6858000"/>
   <p:notesSz cx="6858000" cy="9144000"/>
@@ -270,7 +267,7 @@
           <a:p>
             <a:fld id="{CDD84D26-4C8F-4DC0-8A55-BD6258B78FD0}" type="datetimeFigureOut">
               <a:rPr lang="en-IN" smtClean="0"/>
-              <a:t>28-02-2026</a:t>
+              <a:t>13-04-2026</a:t>
             </a:fld>
             <a:endParaRPr lang="en-IN"/>
           </a:p>
@@ -470,7 +467,7 @@
           <a:p>
             <a:fld id="{CDD84D26-4C8F-4DC0-8A55-BD6258B78FD0}" type="datetimeFigureOut">
               <a:rPr lang="en-IN" smtClean="0"/>
-              <a:t>28-02-2026</a:t>
+              <a:t>13-04-2026</a:t>
             </a:fld>
             <a:endParaRPr lang="en-IN"/>
           </a:p>
@@ -680,7 +677,7 @@
           <a:p>
             <a:fld id="{CDD84D26-4C8F-4DC0-8A55-BD6258B78FD0}" type="datetimeFigureOut">
               <a:rPr lang="en-IN" smtClean="0"/>
-              <a:t>28-02-2026</a:t>
+              <a:t>13-04-2026</a:t>
             </a:fld>
             <a:endParaRPr lang="en-IN"/>
           </a:p>
@@ -880,7 +877,7 @@
           <a:p>
             <a:fld id="{CDD84D26-4C8F-4DC0-8A55-BD6258B78FD0}" type="datetimeFigureOut">
               <a:rPr lang="en-IN" smtClean="0"/>
-              <a:t>28-02-2026</a:t>
+              <a:t>13-04-2026</a:t>
             </a:fld>
             <a:endParaRPr lang="en-IN"/>
           </a:p>
@@ -1156,7 +1153,7 @@
           <a:p>
             <a:fld id="{CDD84D26-4C8F-4DC0-8A55-BD6258B78FD0}" type="datetimeFigureOut">
               <a:rPr lang="en-IN" smtClean="0"/>
-              <a:t>28-02-2026</a:t>
+              <a:t>13-04-2026</a:t>
             </a:fld>
             <a:endParaRPr lang="en-IN"/>
           </a:p>
@@ -1424,7 +1421,7 @@
           <a:p>
             <a:fld id="{CDD84D26-4C8F-4DC0-8A55-BD6258B78FD0}" type="datetimeFigureOut">
               <a:rPr lang="en-IN" smtClean="0"/>
-              <a:t>28-02-2026</a:t>
+              <a:t>13-04-2026</a:t>
             </a:fld>
             <a:endParaRPr lang="en-IN"/>
           </a:p>
@@ -1839,7 +1836,7 @@
           <a:p>
             <a:fld id="{CDD84D26-4C8F-4DC0-8A55-BD6258B78FD0}" type="datetimeFigureOut">
               <a:rPr lang="en-IN" smtClean="0"/>
-              <a:t>28-02-2026</a:t>
+              <a:t>13-04-2026</a:t>
             </a:fld>
             <a:endParaRPr lang="en-IN"/>
           </a:p>
@@ -1981,7 +1978,7 @@
           <a:p>
             <a:fld id="{CDD84D26-4C8F-4DC0-8A55-BD6258B78FD0}" type="datetimeFigureOut">
               <a:rPr lang="en-IN" smtClean="0"/>
-              <a:t>28-02-2026</a:t>
+              <a:t>13-04-2026</a:t>
             </a:fld>
             <a:endParaRPr lang="en-IN"/>
           </a:p>
@@ -2094,7 +2091,7 @@
           <a:p>
             <a:fld id="{CDD84D26-4C8F-4DC0-8A55-BD6258B78FD0}" type="datetimeFigureOut">
               <a:rPr lang="en-IN" smtClean="0"/>
-              <a:t>28-02-2026</a:t>
+              <a:t>13-04-2026</a:t>
             </a:fld>
             <a:endParaRPr lang="en-IN"/>
           </a:p>
@@ -2407,7 +2404,7 @@
           <a:p>
             <a:fld id="{CDD84D26-4C8F-4DC0-8A55-BD6258B78FD0}" type="datetimeFigureOut">
               <a:rPr lang="en-IN" smtClean="0"/>
-              <a:t>28-02-2026</a:t>
+              <a:t>13-04-2026</a:t>
             </a:fld>
             <a:endParaRPr lang="en-IN"/>
           </a:p>
@@ -2696,7 +2693,7 @@
           <a:p>
             <a:fld id="{CDD84D26-4C8F-4DC0-8A55-BD6258B78FD0}" type="datetimeFigureOut">
               <a:rPr lang="en-IN" smtClean="0"/>
-              <a:t>28-02-2026</a:t>
+              <a:t>13-04-2026</a:t>
             </a:fld>
             <a:endParaRPr lang="en-IN"/>
           </a:p>
@@ -2939,7 +2936,7 @@
           <a:p>
             <a:fld id="{CDD84D26-4C8F-4DC0-8A55-BD6258B78FD0}" type="datetimeFigureOut">
               <a:rPr lang="en-IN" smtClean="0"/>
-              <a:t>28-02-2026</a:t>
+              <a:t>13-04-2026</a:t>
             </a:fld>
             <a:endParaRPr lang="en-IN"/>
           </a:p>
@@ -3396,74 +3393,6 @@
     <p:extLst>
       <p:ext uri="{BB962C8B-B14F-4D97-AF65-F5344CB8AC3E}">
         <p14:creationId xmlns:p14="http://schemas.microsoft.com/office/powerpoint/2010/main" val="3447456943"/>
-      </p:ext>
-    </p:extLst>
-  </p:cSld>
-  <p:clrMapOvr>
-    <a:masterClrMapping/>
-  </p:clrMapOvr>
-</p:sld>
-</file>
-
-<file path=ppt/slides/slide10.xml><?xml version="1.0" encoding="utf-8"?>
-<p:sld xmlns:a="http://schemas.openxmlformats.org/drawingml/2006/main" xmlns:r="http://schemas.openxmlformats.org/officeDocument/2006/relationships" xmlns:p="http://schemas.openxmlformats.org/presentationml/2006/main">
-  <p:cSld>
-    <p:spTree>
-      <p:nvGrpSpPr>
-        <p:cNvPr id="1" name="">
-          <a:extLst>
-            <a:ext uri="{FF2B5EF4-FFF2-40B4-BE49-F238E27FC236}">
-              <a16:creationId xmlns:a16="http://schemas.microsoft.com/office/drawing/2014/main" id="{013447EE-46E6-7438-2253-5486A6C3F0D1}"/>
-            </a:ext>
-          </a:extLst>
-        </p:cNvPr>
-        <p:cNvGrpSpPr/>
-        <p:nvPr/>
-      </p:nvGrpSpPr>
-      <p:grpSpPr>
-        <a:xfrm>
-          <a:off x="0" y="0"/>
-          <a:ext cx="0" cy="0"/>
-          <a:chOff x="0" y="0"/>
-          <a:chExt cx="0" cy="0"/>
-        </a:xfrm>
-      </p:grpSpPr>
-      <p:sp>
-        <p:nvSpPr>
-          <p:cNvPr id="2" name="Title 1">
-            <a:extLst>
-              <a:ext uri="{FF2B5EF4-FFF2-40B4-BE49-F238E27FC236}">
-                <a16:creationId xmlns:a16="http://schemas.microsoft.com/office/drawing/2014/main" id="{3EA3DDB5-EBC4-017F-4B24-1B6A43AC02EE}"/>
-              </a:ext>
-            </a:extLst>
-          </p:cNvPr>
-          <p:cNvSpPr>
-            <a:spLocks noGrp="1"/>
-          </p:cNvSpPr>
-          <p:nvPr>
-            <p:ph type="title"/>
-          </p:nvPr>
-        </p:nvSpPr>
-        <p:spPr>
-          <a:xfrm>
-            <a:off x="234696" y="282829"/>
-            <a:ext cx="10515600" cy="421259"/>
-          </a:xfrm>
-        </p:spPr>
-        <p:txBody>
-          <a:bodyPr>
-            <a:normAutofit fontScale="90000"/>
-          </a:bodyPr>
-          <a:lstStyle/>
-          <a:p>
-            <a:endParaRPr lang="en-IN"/>
-          </a:p>
-        </p:txBody>
-      </p:sp>
-    </p:spTree>
-    <p:extLst>
-      <p:ext uri="{BB962C8B-B14F-4D97-AF65-F5344CB8AC3E}">
-        <p14:creationId xmlns:p14="http://schemas.microsoft.com/office/powerpoint/2010/main" val="3163412971"/>
       </p:ext>
     </p:extLst>
   </p:cSld>
@@ -4459,7 +4388,7 @@
           <p:cNvPr id="2" name="Title 1">
             <a:extLst>
               <a:ext uri="{FF2B5EF4-FFF2-40B4-BE49-F238E27FC236}">
-                <a16:creationId xmlns:a16="http://schemas.microsoft.com/office/drawing/2014/main" id="{8F78ED51-861B-17F1-68CE-1404C0213BF2}"/>
+                <a16:creationId xmlns:a16="http://schemas.microsoft.com/office/drawing/2014/main" id="{D40D7EC0-A1B3-2EC5-B578-27F1C0B70A73}"/>
               </a:ext>
             </a:extLst>
           </p:cNvPr>
@@ -4469,59 +4398,84 @@
           <p:nvPr>
             <p:ph type="title"/>
           </p:nvPr>
+        </p:nvSpPr>
+        <p:spPr/>
+        <p:txBody>
+          <a:bodyPr/>
+          <a:lstStyle/>
+          <a:p>
+            <a:r>
+              <a:rPr lang="en-US" dirty="0"/>
+              <a:t>Summary</a:t>
+            </a:r>
+            <a:endParaRPr lang="en-IN" dirty="0"/>
+          </a:p>
+        </p:txBody>
+      </p:sp>
+      <p:sp>
+        <p:nvSpPr>
+          <p:cNvPr id="4" name="Rectangle 3">
+            <a:extLst>
+              <a:ext uri="{FF2B5EF4-FFF2-40B4-BE49-F238E27FC236}">
+                <a16:creationId xmlns:a16="http://schemas.microsoft.com/office/drawing/2014/main" id="{93BE7C1B-7326-5976-0929-DB92924ED010}"/>
+              </a:ext>
+            </a:extLst>
+          </p:cNvPr>
+          <p:cNvSpPr/>
+          <p:nvPr/>
         </p:nvSpPr>
         <p:spPr>
           <a:xfrm>
-            <a:off x="838200" y="365125"/>
-            <a:ext cx="10515600" cy="620713"/>
+            <a:off x="838200" y="2015613"/>
+            <a:ext cx="10763865" cy="4477262"/>
           </a:xfrm>
+          <a:prstGeom prst="rect">
+            <a:avLst/>
+          </a:prstGeom>
+          <a:solidFill>
+            <a:schemeClr val="bg1"/>
+          </a:solidFill>
         </p:spPr>
-        <p:txBody>
-          <a:bodyPr>
-            <a:normAutofit fontScale="90000"/>
-          </a:bodyPr>
-          <a:lstStyle/>
-          <a:p>
-            <a:endParaRPr lang="en-IN" dirty="0"/>
-          </a:p>
-        </p:txBody>
-      </p:sp>
-      <p:sp>
-        <p:nvSpPr>
-          <p:cNvPr id="3" name="Content Placeholder 2">
-            <a:extLst>
-              <a:ext uri="{FF2B5EF4-FFF2-40B4-BE49-F238E27FC236}">
-                <a16:creationId xmlns:a16="http://schemas.microsoft.com/office/drawing/2014/main" id="{2882B648-E6D5-436E-6206-90A6262579B0}"/>
-              </a:ext>
-            </a:extLst>
-          </p:cNvPr>
-          <p:cNvSpPr>
-            <a:spLocks noGrp="1"/>
-          </p:cNvSpPr>
-          <p:nvPr>
-            <p:ph idx="1"/>
-          </p:nvPr>
-        </p:nvSpPr>
-        <p:spPr/>
-        <p:txBody>
-          <a:bodyPr/>
-          <a:lstStyle/>
-          <a:p>
-            <a:pPr marL="0" indent="0">
-              <a:buNone/>
-            </a:pPr>
-            <a:r>
-              <a:rPr lang="en-US" dirty="0"/>
+        <p:style>
+          <a:lnRef idx="2">
+            <a:schemeClr val="accent1">
+              <a:shade val="15000"/>
+            </a:schemeClr>
+          </a:lnRef>
+          <a:fillRef idx="1">
+            <a:schemeClr val="accent1"/>
+          </a:fillRef>
+          <a:effectRef idx="0">
+            <a:schemeClr val="accent1"/>
+          </a:effectRef>
+          <a:fontRef idx="minor">
+            <a:schemeClr val="lt1"/>
+          </a:fontRef>
+        </p:style>
+        <p:txBody>
+          <a:bodyPr rtlCol="0" anchor="ctr"/>
+          <a:lstStyle/>
+          <a:p>
+            <a:r>
+              <a:rPr lang="en-US" dirty="0">
+                <a:solidFill>
+                  <a:schemeClr val="tx1"/>
+                </a:solidFill>
+              </a:rPr>
               <a:t>**Figure[1]</a:t>
             </a:r>
-            <a:endParaRPr lang="en-IN" dirty="0"/>
+            <a:endParaRPr lang="en-IN" dirty="0">
+              <a:solidFill>
+                <a:schemeClr val="tx1"/>
+              </a:solidFill>
+            </a:endParaRPr>
           </a:p>
         </p:txBody>
       </p:sp>
     </p:spTree>
     <p:extLst>
       <p:ext uri="{BB962C8B-B14F-4D97-AF65-F5344CB8AC3E}">
-        <p14:creationId xmlns:p14="http://schemas.microsoft.com/office/powerpoint/2010/main" val="3454484574"/>
+        <p14:creationId xmlns:p14="http://schemas.microsoft.com/office/powerpoint/2010/main" val="2601681797"/>
       </p:ext>
     </p:extLst>
   </p:cSld>
@@ -4539,7 +4493,7 @@
         <p:cNvPr id="1" name="">
           <a:extLst>
             <a:ext uri="{FF2B5EF4-FFF2-40B4-BE49-F238E27FC236}">
-              <a16:creationId xmlns:a16="http://schemas.microsoft.com/office/drawing/2014/main" id="{4EE2AC26-1FAF-F756-01D6-70005A97F198}"/>
+              <a16:creationId xmlns:a16="http://schemas.microsoft.com/office/drawing/2014/main" id="{E6F7F8CC-163A-627F-A840-575D4BC6B7A2}"/>
             </a:ext>
           </a:extLst>
         </p:cNvPr>
@@ -4559,7 +4513,7 @@
           <p:cNvPr id="2" name="Title 1">
             <a:extLst>
               <a:ext uri="{FF2B5EF4-FFF2-40B4-BE49-F238E27FC236}">
-                <a16:creationId xmlns:a16="http://schemas.microsoft.com/office/drawing/2014/main" id="{03363141-9451-2101-E6AC-8E7EF69DB876}"/>
+                <a16:creationId xmlns:a16="http://schemas.microsoft.com/office/drawing/2014/main" id="{B4C9082C-1A71-25F2-53C1-18957B58FDD0}"/>
               </a:ext>
             </a:extLst>
           </p:cNvPr>
@@ -4569,59 +4523,84 @@
           <p:nvPr>
             <p:ph type="title"/>
           </p:nvPr>
+        </p:nvSpPr>
+        <p:spPr/>
+        <p:txBody>
+          <a:bodyPr/>
+          <a:lstStyle/>
+          <a:p>
+            <a:r>
+              <a:rPr lang="en-US" dirty="0"/>
+              <a:t>Battery</a:t>
+            </a:r>
+            <a:endParaRPr lang="en-IN" dirty="0"/>
+          </a:p>
+        </p:txBody>
+      </p:sp>
+      <p:sp>
+        <p:nvSpPr>
+          <p:cNvPr id="4" name="Rectangle 3">
+            <a:extLst>
+              <a:ext uri="{FF2B5EF4-FFF2-40B4-BE49-F238E27FC236}">
+                <a16:creationId xmlns:a16="http://schemas.microsoft.com/office/drawing/2014/main" id="{47FB730A-1A91-2755-3F14-1E6D36FB2B19}"/>
+              </a:ext>
+            </a:extLst>
+          </p:cNvPr>
+          <p:cNvSpPr/>
+          <p:nvPr/>
         </p:nvSpPr>
         <p:spPr>
           <a:xfrm>
-            <a:off x="838200" y="365125"/>
-            <a:ext cx="10515600" cy="620713"/>
+            <a:off x="838200" y="2015613"/>
+            <a:ext cx="10763865" cy="4477262"/>
           </a:xfrm>
+          <a:prstGeom prst="rect">
+            <a:avLst/>
+          </a:prstGeom>
+          <a:solidFill>
+            <a:schemeClr val="bg1"/>
+          </a:solidFill>
         </p:spPr>
-        <p:txBody>
-          <a:bodyPr>
-            <a:normAutofit fontScale="90000"/>
-          </a:bodyPr>
-          <a:lstStyle/>
-          <a:p>
-            <a:endParaRPr lang="en-IN" dirty="0"/>
-          </a:p>
-        </p:txBody>
-      </p:sp>
-      <p:sp>
-        <p:nvSpPr>
-          <p:cNvPr id="3" name="Content Placeholder 2">
-            <a:extLst>
-              <a:ext uri="{FF2B5EF4-FFF2-40B4-BE49-F238E27FC236}">
-                <a16:creationId xmlns:a16="http://schemas.microsoft.com/office/drawing/2014/main" id="{683AECF2-8078-AD0F-3034-A654955EBAA5}"/>
-              </a:ext>
-            </a:extLst>
-          </p:cNvPr>
-          <p:cNvSpPr>
-            <a:spLocks noGrp="1"/>
-          </p:cNvSpPr>
-          <p:nvPr>
-            <p:ph idx="1"/>
-          </p:nvPr>
-        </p:nvSpPr>
-        <p:spPr/>
-        <p:txBody>
-          <a:bodyPr/>
-          <a:lstStyle/>
-          <a:p>
-            <a:pPr marL="0" indent="0">
-              <a:buNone/>
-            </a:pPr>
-            <a:r>
-              <a:rPr lang="en-US" dirty="0"/>
-              <a:t>**Figure[1][2]</a:t>
-            </a:r>
-            <a:endParaRPr lang="en-IN" dirty="0"/>
+        <p:style>
+          <a:lnRef idx="2">
+            <a:schemeClr val="accent1">
+              <a:shade val="15000"/>
+            </a:schemeClr>
+          </a:lnRef>
+          <a:fillRef idx="1">
+            <a:schemeClr val="accent1"/>
+          </a:fillRef>
+          <a:effectRef idx="0">
+            <a:schemeClr val="accent1"/>
+          </a:effectRef>
+          <a:fontRef idx="minor">
+            <a:schemeClr val="lt1"/>
+          </a:fontRef>
+        </p:style>
+        <p:txBody>
+          <a:bodyPr rtlCol="0" anchor="ctr"/>
+          <a:lstStyle/>
+          <a:p>
+            <a:r>
+              <a:rPr lang="en-US" dirty="0">
+                <a:solidFill>
+                  <a:schemeClr val="tx1"/>
+                </a:solidFill>
+              </a:rPr>
+              <a:t>**Figure[4]</a:t>
+            </a:r>
+            <a:endParaRPr lang="en-IN" dirty="0">
+              <a:solidFill>
+                <a:schemeClr val="tx1"/>
+              </a:solidFill>
+            </a:endParaRPr>
           </a:p>
         </p:txBody>
       </p:sp>
     </p:spTree>
     <p:extLst>
       <p:ext uri="{BB962C8B-B14F-4D97-AF65-F5344CB8AC3E}">
-        <p14:creationId xmlns:p14="http://schemas.microsoft.com/office/powerpoint/2010/main" val="3965796066"/>
+        <p14:creationId xmlns:p14="http://schemas.microsoft.com/office/powerpoint/2010/main" val="2301372809"/>
       </p:ext>
     </p:extLst>
   </p:cSld>
@@ -4639,7 +4618,7 @@
         <p:cNvPr id="1" name="">
           <a:extLst>
             <a:ext uri="{FF2B5EF4-FFF2-40B4-BE49-F238E27FC236}">
-              <a16:creationId xmlns:a16="http://schemas.microsoft.com/office/drawing/2014/main" id="{22124FDD-679C-7B56-867B-E9ECFCA5B77E}"/>
+              <a16:creationId xmlns:a16="http://schemas.microsoft.com/office/drawing/2014/main" id="{1ABD07BC-AADC-67C2-359F-D17A89054888}"/>
             </a:ext>
           </a:extLst>
         </p:cNvPr>
@@ -4659,7 +4638,7 @@
           <p:cNvPr id="2" name="Title 1">
             <a:extLst>
               <a:ext uri="{FF2B5EF4-FFF2-40B4-BE49-F238E27FC236}">
-                <a16:creationId xmlns:a16="http://schemas.microsoft.com/office/drawing/2014/main" id="{671D4C59-1C2C-FF66-05A4-35E101B044F3}"/>
+                <a16:creationId xmlns:a16="http://schemas.microsoft.com/office/drawing/2014/main" id="{45B72C22-100F-4AD5-1B20-7F717319AB1E}"/>
               </a:ext>
             </a:extLst>
           </p:cNvPr>
@@ -4669,27 +4648,88 @@
           <p:nvPr>
             <p:ph type="title"/>
           </p:nvPr>
+        </p:nvSpPr>
+        <p:spPr/>
+        <p:txBody>
+          <a:bodyPr/>
+          <a:lstStyle/>
+          <a:p>
+            <a:r>
+              <a:rPr lang="en-US" dirty="0" err="1"/>
+              <a:t>eDrive</a:t>
+            </a:r>
+            <a:r>
+              <a:rPr lang="en-US" dirty="0"/>
+              <a:t> - Aux</a:t>
+            </a:r>
+            <a:endParaRPr lang="en-IN" dirty="0"/>
+          </a:p>
+        </p:txBody>
+      </p:sp>
+      <p:sp>
+        <p:nvSpPr>
+          <p:cNvPr id="4" name="Rectangle 3">
+            <a:extLst>
+              <a:ext uri="{FF2B5EF4-FFF2-40B4-BE49-F238E27FC236}">
+                <a16:creationId xmlns:a16="http://schemas.microsoft.com/office/drawing/2014/main" id="{826F72C2-EFD8-FC53-A8D8-803E115D5A55}"/>
+              </a:ext>
+            </a:extLst>
+          </p:cNvPr>
+          <p:cNvSpPr/>
+          <p:nvPr/>
         </p:nvSpPr>
         <p:spPr>
           <a:xfrm>
-            <a:off x="234696" y="282829"/>
-            <a:ext cx="10515600" cy="421259"/>
+            <a:off x="513735" y="1690688"/>
+            <a:ext cx="10763865" cy="4477262"/>
           </a:xfrm>
+          <a:prstGeom prst="rect">
+            <a:avLst/>
+          </a:prstGeom>
+          <a:solidFill>
+            <a:schemeClr val="bg1"/>
+          </a:solidFill>
         </p:spPr>
-        <p:txBody>
-          <a:bodyPr>
-            <a:normAutofit fontScale="90000"/>
-          </a:bodyPr>
-          <a:lstStyle/>
-          <a:p>
-            <a:endParaRPr lang="en-IN"/>
+        <p:style>
+          <a:lnRef idx="2">
+            <a:schemeClr val="accent1">
+              <a:shade val="15000"/>
+            </a:schemeClr>
+          </a:lnRef>
+          <a:fillRef idx="1">
+            <a:schemeClr val="accent1"/>
+          </a:fillRef>
+          <a:effectRef idx="0">
+            <a:schemeClr val="accent1"/>
+          </a:effectRef>
+          <a:fontRef idx="minor">
+            <a:schemeClr val="lt1"/>
+          </a:fontRef>
+        </p:style>
+        <p:txBody>
+          <a:bodyPr rtlCol="0" anchor="ctr"/>
+          <a:lstStyle/>
+          <a:p>
+            <a:r>
+              <a:rPr lang="en-US" dirty="0">
+                <a:solidFill>
+                  <a:schemeClr val="tx1"/>
+                </a:solidFill>
+              </a:rPr>
+              <a:t>**Figure[6]</a:t>
+            </a:r>
+            <a:endParaRPr lang="en-IN" dirty="0">
+              <a:solidFill>
+                <a:schemeClr val="tx1"/>
+              </a:solidFill>
+            </a:endParaRPr>
           </a:p>
         </p:txBody>
       </p:sp>
     </p:spTree>
     <p:extLst>
       <p:ext uri="{BB962C8B-B14F-4D97-AF65-F5344CB8AC3E}">
-        <p14:creationId xmlns:p14="http://schemas.microsoft.com/office/powerpoint/2010/main" val="997334903"/>
+        <p14:creationId xmlns:p14="http://schemas.microsoft.com/office/powerpoint/2010/main" val="2586608718"/>
       </p:ext>
     </p:extLst>
   </p:cSld>
@@ -4700,74 +4740,6 @@
 </file>
 
 <file path=ppt/slides/slide7.xml><?xml version="1.0" encoding="utf-8"?>
-<p:sld xmlns:a="http://schemas.openxmlformats.org/drawingml/2006/main" xmlns:r="http://schemas.openxmlformats.org/officeDocument/2006/relationships" xmlns:p="http://schemas.openxmlformats.org/presentationml/2006/main">
-  <p:cSld>
-    <p:spTree>
-      <p:nvGrpSpPr>
-        <p:cNvPr id="1" name="">
-          <a:extLst>
-            <a:ext uri="{FF2B5EF4-FFF2-40B4-BE49-F238E27FC236}">
-              <a16:creationId xmlns:a16="http://schemas.microsoft.com/office/drawing/2014/main" id="{178B3CA9-D036-DF8A-E9B5-965732A4DC0D}"/>
-            </a:ext>
-          </a:extLst>
-        </p:cNvPr>
-        <p:cNvGrpSpPr/>
-        <p:nvPr/>
-      </p:nvGrpSpPr>
-      <p:grpSpPr>
-        <a:xfrm>
-          <a:off x="0" y="0"/>
-          <a:ext cx="0" cy="0"/>
-          <a:chOff x="0" y="0"/>
-          <a:chExt cx="0" cy="0"/>
-        </a:xfrm>
-      </p:grpSpPr>
-      <p:sp>
-        <p:nvSpPr>
-          <p:cNvPr id="2" name="Title 1">
-            <a:extLst>
-              <a:ext uri="{FF2B5EF4-FFF2-40B4-BE49-F238E27FC236}">
-                <a16:creationId xmlns:a16="http://schemas.microsoft.com/office/drawing/2014/main" id="{C7293CE5-2E6A-D64B-5AE0-B99AA9A35F68}"/>
-              </a:ext>
-            </a:extLst>
-          </p:cNvPr>
-          <p:cNvSpPr>
-            <a:spLocks noGrp="1"/>
-          </p:cNvSpPr>
-          <p:nvPr>
-            <p:ph type="title"/>
-          </p:nvPr>
-        </p:nvSpPr>
-        <p:spPr>
-          <a:xfrm>
-            <a:off x="234696" y="282829"/>
-            <a:ext cx="10515600" cy="421259"/>
-          </a:xfrm>
-        </p:spPr>
-        <p:txBody>
-          <a:bodyPr>
-            <a:normAutofit fontScale="90000"/>
-          </a:bodyPr>
-          <a:lstStyle/>
-          <a:p>
-            <a:endParaRPr lang="en-IN"/>
-          </a:p>
-        </p:txBody>
-      </p:sp>
-    </p:spTree>
-    <p:extLst>
-      <p:ext uri="{BB962C8B-B14F-4D97-AF65-F5344CB8AC3E}">
-        <p14:creationId xmlns:p14="http://schemas.microsoft.com/office/powerpoint/2010/main" val="1809832070"/>
-      </p:ext>
-    </p:extLst>
-  </p:cSld>
-  <p:clrMapOvr>
-    <a:masterClrMapping/>
-  </p:clrMapOvr>
-</p:sld>
-</file>
-
-<file path=ppt/slides/slide8.xml><?xml version="1.0" encoding="utf-8"?>
 <p:sld xmlns:a="http://schemas.openxmlformats.org/drawingml/2006/main" xmlns:r="http://schemas.openxmlformats.org/officeDocument/2006/relationships" xmlns:p="http://schemas.openxmlformats.org/presentationml/2006/main">
   <p:cSld>
     <p:spTree>
@@ -4808,7 +4780,7 @@
         </p:nvSpPr>
         <p:spPr>
           <a:xfrm>
-            <a:off x="234696" y="282829"/>
+            <a:off x="470670" y="3320997"/>
             <a:ext cx="10515600" cy="421259"/>
           </a:xfrm>
         </p:spPr>
@@ -4818,7 +4790,11 @@
           </a:bodyPr>
           <a:lstStyle/>
           <a:p>
-            <a:endParaRPr lang="en-IN"/>
+            <a:r>
+              <a:rPr lang="en-US" dirty="0"/>
+              <a:t>Thankyou</a:t>
+            </a:r>
+            <a:endParaRPr lang="en-IN" dirty="0"/>
           </a:p>
         </p:txBody>
       </p:sp>
@@ -4826,74 +4802,6 @@
     <p:extLst>
       <p:ext uri="{BB962C8B-B14F-4D97-AF65-F5344CB8AC3E}">
         <p14:creationId xmlns:p14="http://schemas.microsoft.com/office/powerpoint/2010/main" val="3479629592"/>
-      </p:ext>
-    </p:extLst>
-  </p:cSld>
-  <p:clrMapOvr>
-    <a:masterClrMapping/>
-  </p:clrMapOvr>
-</p:sld>
-</file>
-
-<file path=ppt/slides/slide9.xml><?xml version="1.0" encoding="utf-8"?>
-<p:sld xmlns:a="http://schemas.openxmlformats.org/drawingml/2006/main" xmlns:r="http://schemas.openxmlformats.org/officeDocument/2006/relationships" xmlns:p="http://schemas.openxmlformats.org/presentationml/2006/main">
-  <p:cSld>
-    <p:spTree>
-      <p:nvGrpSpPr>
-        <p:cNvPr id="1" name="">
-          <a:extLst>
-            <a:ext uri="{FF2B5EF4-FFF2-40B4-BE49-F238E27FC236}">
-              <a16:creationId xmlns:a16="http://schemas.microsoft.com/office/drawing/2014/main" id="{10756C54-163E-7891-0740-7F5178702D8B}"/>
-            </a:ext>
-          </a:extLst>
-        </p:cNvPr>
-        <p:cNvGrpSpPr/>
-        <p:nvPr/>
-      </p:nvGrpSpPr>
-      <p:grpSpPr>
-        <a:xfrm>
-          <a:off x="0" y="0"/>
-          <a:ext cx="0" cy="0"/>
-          <a:chOff x="0" y="0"/>
-          <a:chExt cx="0" cy="0"/>
-        </a:xfrm>
-      </p:grpSpPr>
-      <p:sp>
-        <p:nvSpPr>
-          <p:cNvPr id="2" name="Title 1">
-            <a:extLst>
-              <a:ext uri="{FF2B5EF4-FFF2-40B4-BE49-F238E27FC236}">
-                <a16:creationId xmlns:a16="http://schemas.microsoft.com/office/drawing/2014/main" id="{3722FA39-B54C-A57A-E0F5-A78DFD020E26}"/>
-              </a:ext>
-            </a:extLst>
-          </p:cNvPr>
-          <p:cNvSpPr>
-            <a:spLocks noGrp="1"/>
-          </p:cNvSpPr>
-          <p:nvPr>
-            <p:ph type="title"/>
-          </p:nvPr>
-        </p:nvSpPr>
-        <p:spPr>
-          <a:xfrm>
-            <a:off x="234696" y="282829"/>
-            <a:ext cx="10515600" cy="421259"/>
-          </a:xfrm>
-        </p:spPr>
-        <p:txBody>
-          <a:bodyPr>
-            <a:normAutofit fontScale="90000"/>
-          </a:bodyPr>
-          <a:lstStyle/>
-          <a:p>
-            <a:endParaRPr lang="en-IN"/>
-          </a:p>
-        </p:txBody>
-      </p:sp>
-    </p:spTree>
-    <p:extLst>
-      <p:ext uri="{BB962C8B-B14F-4D97-AF65-F5344CB8AC3E}">
-        <p14:creationId xmlns:p14="http://schemas.microsoft.com/office/powerpoint/2010/main" val="2444848810"/>
       </p:ext>
     </p:extLst>
   </p:cSld>
